--- a/testing/manual/fallback_ladder_demo.pptx
+++ b/testing/manual/fallback_ladder_demo.pptx
@@ -1036,7 +1036,7 @@
   </a:themeElements>
   <a:extLst>
     <a:ext uri="{05A4C25C-085E-4340-85A3-A5531E510DB2}">
-      <thm15:themeFamily xmlns:thm15="http://schemas.microsoft.com/office/thememl/2012/main" name="svg2ooxml" id="{8A7DC68F-4D83-45E5-9379-045331CD2B90}" vid="{88463BD6-1390-459C-AD0B-714A6F7A1A34}"/>
+      <thm15:themeFamily xmlns:thm15="http://schemas.microsoft.com/office/thememl/2012/main" name="svg2ooxml" id="{B67A927A-AD71-451E-B2FE-2EFF224589F3}" vid="{C538FC3B-5916-4247-953E-E36BB945798D}"/>
     </a:ext>
   </a:extLst>
 </a:theme>
